--- a/Base/Tema1_Evoluzione_e_rilevanza_AI.pptx
+++ b/Base/Tema1_Evoluzione_e_rilevanza_AI.pptx
@@ -558,12 +558,6 @@
             <c:idx val="0"/>
             <c:invertIfNegative val="0"/>
             <c:bubble3D val="0"/>
-            <c:spPr>
-              <a:solidFill>
-                <a:srgbClr val="8A939E"/>
-              </a:solidFill>
-              <a:effectLst/>
-            </c:spPr>
             <c:extLst>
               <c:ext xmlns:c16="http://schemas.microsoft.com/office/drawing/2014/chart" uri="{C3380CC4-5D6E-409C-BE32-E72D297353CC}">
                 <c16:uniqueId val="{00000001-4F66-9640-855F-6BCD53F93708}"/>
@@ -3888,7 +3882,15 @@
           <a:p>
             <a:r>
               <a:rPr lang="en-US" dirty="0"/>
-              <a:t>L'AI può produrre effetti su tre dimensioni principali. Produttività: svolgere certe attività in meno tempo, per esempio una prima bozza di documento o la sintesi di materiali lunghi. Qualità: migliorare l'output, per esempio con testi più chiari, controlli più sistematici, analisi più complete. Innovazione: rendere possibili cose prima non praticabili, come nuovi servizi o l'esplorazione rapida di molte alternative. Sottolineare la parola 'potenziali'. Un esempio di evidenza empirica: lo studio di Erik Brynjolfsson, Danielle Li e Lindsey Raymond, pubblicato nel 2025 sul Quarterly Journal of Economics, condotto su 5.172 operatori di assistenza clienti di un'azienda di software, ha rilevato che l'introduzione di un assistente basato su AI generativa ha aumentato in media del 15% il numero di problemi risolti per ora. L'aumento è stato del 36% per gli operatori meno qualificati, mentre per i più qualificati non si è osservato un aumento di produttività. Una precisazione utile se qualcuno conosce lo studio: la prima versione del 2023, ancora molto citata, riportava valori leggermente diversi, 14% e 34%. È un risultato interessante perché mostra due cose: i benefici possono essere reali e misurabili, ma non sono uguali per tutti. È un singolo studio in un contesto specifico: non va generalizzato automaticamente ad altri contesti. Fonte: Brynjolfsson, Li, Raymond, 'Generative AI at Work', The Quarterly Journal of Economics, 140(2), 2025. Lo studio è ripreso nel Tema 12, dedicato alla creazione di valore.</a:t>
+              <a:t>L'AI può produrre effetti su tre dimensioni principali. Produttività: svolgere certe attività in meno tempo, per esempio una prima bozza di documento o la sintesi di materiali lunghi. Qualità: migliorare l'output, per esempio con testi più chiari, controlli più sistematici, analisi più complete. Innovazione: rendere possibili cose prima non praticabili, come nuovi servizi o l'esplorazione rapida di molte alternative. Sottolineare la parola 'potenziali'. Un esempio di evidenza empirica: lo studio di Erik Brynjolfsson, Danielle Li e Lindsey Raymond, pubblicato nel 2025 sul </a:t>
+            </a:r>
+            <a:r>
+              <a:rPr lang="en-US" b="1" dirty="0"/>
+              <a:t>Quarterly Journal of Economics</a:t>
+            </a:r>
+            <a:r>
+              <a:rPr lang="en-US" dirty="0"/>
+              <a:t>, condotto su 5.172 operatori di assistenza clienti di un'azienda di software, ha rilevato che l'introduzione di un assistente basato su AI generativa ha aumentato in media del 15% il numero di problemi risolti per ora. L'aumento è stato del 36% per gli operatori meno qualificati, mentre per i più qualificati non si è osservato un aumento di produttività. Una precisazione utile se qualcuno conosce lo studio: la prima versione del 2023, ancora molto citata, riportava valori leggermente diversi, 14% e 34%. È un risultato interessante perché mostra due cose: i benefici possono essere reali e misurabili, ma non sono uguali per tutti. È un singolo studio in un contesto specifico: non va generalizzato automaticamente ad altri contesti. Fonte: Brynjolfsson, Li, Raymond, 'Generative AI at Work', The Quarterly Journal of Economics, 140(2), 2025. Lo studio è ripreso nel Tema 12, dedicato alla creazione di valore.</a:t>
             </a:r>
           </a:p>
         </p:txBody>
@@ -6119,8 +6121,22 @@
             </a:r>
             <a:r>
               <a:rPr lang="en-US" dirty="0"/>
-              <a:t> . 1958: Frank Rosenblatt presenta il perceptron, uno dei primi modelli di neurone artificiale, antenato lontano delle reti neurali di oggi. Anni Settanta e Ottanta: si diffondono i sistemi esperti, che codificano la conoscenza di specialisti in regole. 1997: il computer Deep Blue di IBM batte il campione del mondo di scacchi Garry Kasparov, un traguardo simbolico raggiunto però con un sistema altamente specializzato. 2012: una rete neurale profonda (AlexNet) vince nettamente una competizione di riconoscimento delle immagini basata sul dataset ImageNet, segnando la svolta del deep learning. 2017: ricercatori di Google pubblicano l'architettura Transformer, alla base dei moderni modelli linguistici. 2022: il lancio pubblico di ChatGPT porta l'AI generativa al grande pubblico. Messaggio: ciò che vediamo oggi è l'ultimo tratto di una lunga strada.</a:t>
-            </a:r>
+              <a:t> . 1958: Frank Rosenblatt presenta il perceptron, uno dei primi modelli di neurone artificiale, antenato lontano delle reti neurali di oggi. Anni Settanta e Ottanta: si diffondono i sistemi esperti, che codificano la conoscenza di specialisti in regole. 1997: il computer Deep Blue di IBM batte il campione del mondo di scacchi Garry Kasparov, un traguardo simbolico raggiunto però con un sistema altamente specializzato. 2012: una rete neurale profonda (AlexNet) vince nettamente una competizione di riconoscimento delle immagini basata sul dataset ImageNet, segnando la svolta del deep learning. 2017: ricercatori di Google pubblicano l'architettura Transformer, alla base dei moderni modelli linguistici. 2022: il lancio pubblico di ChatGPT porta l'AI generativa al grande pubblico. Messaggio: ciò che vediamo oggi è l'ultimo tratto di una lunga </a:t>
+            </a:r>
+            <a:r>
+              <a:rPr lang="en-US" dirty="0" err="1"/>
+              <a:t>strada</a:t>
+            </a:r>
+            <a:r>
+              <a:rPr lang="en-US" dirty="0"/>
+              <a:t>.</a:t>
+            </a:r>
+          </a:p>
+          <a:p>
+            <a:endParaRPr lang="en-US" dirty="0"/>
+          </a:p>
+          <a:p>
+            <a:endParaRPr lang="en-US" dirty="0"/>
           </a:p>
         </p:txBody>
       </p:sp>
@@ -6637,7 +6653,7 @@
           </a:prstGeom>
           <a:extLst>
             <a:ext uri="{C572A759-6A51-4108-AA02-DFA0A04FC94B}">
-              <ma14:wrappingTextBoxFlag xmlns:ma14="http://schemas.microsoft.com/office/mac/drawingml/2011/main" xmlns="" val="0"/>
+              <ma14:wrappingTextBoxFlag xmlns="" xmlns:ma14="http://schemas.microsoft.com/office/mac/drawingml/2011/main" val="0"/>
             </a:ext>
           </a:extLst>
         </p:spPr>
@@ -6792,7 +6808,7 @@
           </a:prstGeom>
           <a:extLst>
             <a:ext uri="{C572A759-6A51-4108-AA02-DFA0A04FC94B}">
-              <ma14:wrappingTextBoxFlag xmlns:ma14="http://schemas.microsoft.com/office/mac/drawingml/2011/main" xmlns="" val="0"/>
+              <ma14:wrappingTextBoxFlag xmlns="" xmlns:ma14="http://schemas.microsoft.com/office/mac/drawingml/2011/main" val="0"/>
             </a:ext>
           </a:extLst>
         </p:spPr>
@@ -7024,7 +7040,7 @@
           </a:prstGeom>
           <a:extLst>
             <a:ext uri="{C572A759-6A51-4108-AA02-DFA0A04FC94B}">
-              <ma14:wrappingTextBoxFlag xmlns:ma14="http://schemas.microsoft.com/office/mac/drawingml/2011/main" xmlns="" val="0"/>
+              <ma14:wrappingTextBoxFlag xmlns="" xmlns:ma14="http://schemas.microsoft.com/office/mac/drawingml/2011/main" val="0"/>
             </a:ext>
           </a:extLst>
         </p:spPr>
@@ -7099,7 +7115,7 @@
           </a:prstGeom>
           <a:extLst>
             <a:ext uri="{C572A759-6A51-4108-AA02-DFA0A04FC94B}">
-              <ma14:wrappingTextBoxFlag xmlns:ma14="http://schemas.microsoft.com/office/mac/drawingml/2011/main" xmlns="" val="0"/>
+              <ma14:wrappingTextBoxFlag xmlns="" xmlns:ma14="http://schemas.microsoft.com/office/mac/drawingml/2011/main" val="0"/>
             </a:ext>
           </a:extLst>
         </p:spPr>
@@ -7914,7 +7930,7 @@
           </a:prstGeom>
           <a:extLst>
             <a:ext uri="{C572A759-6A51-4108-AA02-DFA0A04FC94B}">
-              <ma14:wrappingTextBoxFlag xmlns:ma14="http://schemas.microsoft.com/office/mac/drawingml/2011/main" xmlns="" val="0"/>
+              <ma14:wrappingTextBoxFlag xmlns="" xmlns:ma14="http://schemas.microsoft.com/office/mac/drawingml/2011/main" val="0"/>
             </a:ext>
           </a:extLst>
         </p:spPr>
@@ -8796,7 +8812,7 @@
           </a:prstGeom>
           <a:extLst>
             <a:ext uri="{C572A759-6A51-4108-AA02-DFA0A04FC94B}">
-              <ma14:wrappingTextBoxFlag xmlns:ma14="http://schemas.microsoft.com/office/mac/drawingml/2011/main" xmlns="" val="0"/>
+              <ma14:wrappingTextBoxFlag xmlns="" xmlns:ma14="http://schemas.microsoft.com/office/mac/drawingml/2011/main" val="0"/>
             </a:ext>
           </a:extLst>
         </p:spPr>
@@ -9321,7 +9337,7 @@
           </a:prstGeom>
           <a:extLst>
             <a:ext uri="{C572A759-6A51-4108-AA02-DFA0A04FC94B}">
-              <ma14:wrappingTextBoxFlag xmlns:ma14="http://schemas.microsoft.com/office/mac/drawingml/2011/main" xmlns="" val="0"/>
+              <ma14:wrappingTextBoxFlag xmlns="" xmlns:ma14="http://schemas.microsoft.com/office/mac/drawingml/2011/main" val="0"/>
             </a:ext>
           </a:extLst>
         </p:spPr>
@@ -9878,7 +9894,7 @@
           </a:prstGeom>
           <a:extLst>
             <a:ext uri="{C572A759-6A51-4108-AA02-DFA0A04FC94B}">
-              <ma14:wrappingTextBoxFlag xmlns:ma14="http://schemas.microsoft.com/office/mac/drawingml/2011/main" xmlns="" val="0"/>
+              <ma14:wrappingTextBoxFlag xmlns="" xmlns:ma14="http://schemas.microsoft.com/office/mac/drawingml/2011/main" val="0"/>
             </a:ext>
           </a:extLst>
         </p:spPr>
@@ -10028,7 +10044,7 @@
           </a:prstGeom>
           <a:extLst>
             <a:ext uri="{C572A759-6A51-4108-AA02-DFA0A04FC94B}">
-              <ma14:wrappingTextBoxFlag xmlns:ma14="http://schemas.microsoft.com/office/mac/drawingml/2011/main" xmlns="" val="0"/>
+              <ma14:wrappingTextBoxFlag xmlns="" xmlns:ma14="http://schemas.microsoft.com/office/mac/drawingml/2011/main" val="0"/>
             </a:ext>
           </a:extLst>
         </p:spPr>
@@ -10218,7 +10234,7 @@
           </a:prstGeom>
           <a:extLst>
             <a:ext uri="{C572A759-6A51-4108-AA02-DFA0A04FC94B}">
-              <ma14:wrappingTextBoxFlag xmlns:ma14="http://schemas.microsoft.com/office/mac/drawingml/2011/main" xmlns="" val="0"/>
+              <ma14:wrappingTextBoxFlag xmlns="" xmlns:ma14="http://schemas.microsoft.com/office/mac/drawingml/2011/main" val="0"/>
             </a:ext>
           </a:extLst>
         </p:spPr>
@@ -11204,7 +11220,7 @@
           </a:prstGeom>
           <a:extLst>
             <a:ext uri="{C572A759-6A51-4108-AA02-DFA0A04FC94B}">
-              <ma14:wrappingTextBoxFlag xmlns:ma14="http://schemas.microsoft.com/office/mac/drawingml/2011/main" xmlns="" val="0"/>
+              <ma14:wrappingTextBoxFlag xmlns="" xmlns:ma14="http://schemas.microsoft.com/office/mac/drawingml/2011/main" val="0"/>
             </a:ext>
           </a:extLst>
         </p:spPr>
@@ -11836,7 +11852,7 @@
           </a:prstGeom>
           <a:extLst>
             <a:ext uri="{C572A759-6A51-4108-AA02-DFA0A04FC94B}">
-              <ma14:wrappingTextBoxFlag xmlns:ma14="http://schemas.microsoft.com/office/mac/drawingml/2011/main" xmlns="" val="0"/>
+              <ma14:wrappingTextBoxFlag xmlns="" xmlns:ma14="http://schemas.microsoft.com/office/mac/drawingml/2011/main" val="0"/>
             </a:ext>
           </a:extLst>
         </p:spPr>
@@ -12795,7 +12811,7 @@
           </a:prstGeom>
           <a:extLst>
             <a:ext uri="{C572A759-6A51-4108-AA02-DFA0A04FC94B}">
-              <ma14:wrappingTextBoxFlag xmlns:ma14="http://schemas.microsoft.com/office/mac/drawingml/2011/main" xmlns="" val="0"/>
+              <ma14:wrappingTextBoxFlag xmlns="" xmlns:ma14="http://schemas.microsoft.com/office/mac/drawingml/2011/main" val="0"/>
             </a:ext>
           </a:extLst>
         </p:spPr>
@@ -13578,7 +13594,7 @@
           </a:prstGeom>
           <a:extLst>
             <a:ext uri="{C572A759-6A51-4108-AA02-DFA0A04FC94B}">
-              <ma14:wrappingTextBoxFlag xmlns:ma14="http://schemas.microsoft.com/office/mac/drawingml/2011/main" xmlns="" val="0"/>
+              <ma14:wrappingTextBoxFlag xmlns="" xmlns:ma14="http://schemas.microsoft.com/office/mac/drawingml/2011/main" val="0"/>
             </a:ext>
           </a:extLst>
         </p:spPr>
@@ -14055,7 +14071,7 @@
           </a:prstGeom>
           <a:extLst>
             <a:ext uri="{C572A759-6A51-4108-AA02-DFA0A04FC94B}">
-              <ma14:wrappingTextBoxFlag xmlns:ma14="http://schemas.microsoft.com/office/mac/drawingml/2011/main" xmlns="" val="0"/>
+              <ma14:wrappingTextBoxFlag xmlns="" xmlns:ma14="http://schemas.microsoft.com/office/mac/drawingml/2011/main" val="0"/>
             </a:ext>
           </a:extLst>
         </p:spPr>
@@ -14527,7 +14543,7 @@
           </a:prstGeom>
           <a:extLst>
             <a:ext uri="{C572A759-6A51-4108-AA02-DFA0A04FC94B}">
-              <ma14:wrappingTextBoxFlag xmlns:ma14="http://schemas.microsoft.com/office/mac/drawingml/2011/main" xmlns="" val="0"/>
+              <ma14:wrappingTextBoxFlag xmlns="" xmlns:ma14="http://schemas.microsoft.com/office/mac/drawingml/2011/main" val="0"/>
             </a:ext>
           </a:extLst>
         </p:spPr>
@@ -15237,7 +15253,7 @@
           </a:prstGeom>
           <a:extLst>
             <a:ext uri="{C572A759-6A51-4108-AA02-DFA0A04FC94B}">
-              <ma14:wrappingTextBoxFlag xmlns:ma14="http://schemas.microsoft.com/office/mac/drawingml/2011/main" xmlns="" val="0"/>
+              <ma14:wrappingTextBoxFlag xmlns="" xmlns:ma14="http://schemas.microsoft.com/office/mac/drawingml/2011/main" val="0"/>
             </a:ext>
           </a:extLst>
         </p:spPr>
@@ -15387,7 +15403,7 @@
           </a:prstGeom>
           <a:extLst>
             <a:ext uri="{C572A759-6A51-4108-AA02-DFA0A04FC94B}">
-              <ma14:wrappingTextBoxFlag xmlns:ma14="http://schemas.microsoft.com/office/mac/drawingml/2011/main" xmlns="" val="0"/>
+              <ma14:wrappingTextBoxFlag xmlns="" xmlns:ma14="http://schemas.microsoft.com/office/mac/drawingml/2011/main" val="0"/>
             </a:ext>
           </a:extLst>
         </p:spPr>
@@ -15577,7 +15593,7 @@
           </a:prstGeom>
           <a:extLst>
             <a:ext uri="{C572A759-6A51-4108-AA02-DFA0A04FC94B}">
-              <ma14:wrappingTextBoxFlag xmlns:ma14="http://schemas.microsoft.com/office/mac/drawingml/2011/main" xmlns="" val="0"/>
+              <ma14:wrappingTextBoxFlag xmlns="" xmlns:ma14="http://schemas.microsoft.com/office/mac/drawingml/2011/main" val="0"/>
             </a:ext>
           </a:extLst>
         </p:spPr>
@@ -16168,7 +16184,7 @@
           </a:prstGeom>
           <a:extLst>
             <a:ext uri="{C572A759-6A51-4108-AA02-DFA0A04FC94B}">
-              <ma14:wrappingTextBoxFlag xmlns:ma14="http://schemas.microsoft.com/office/mac/drawingml/2011/main" xmlns="" val="0"/>
+              <ma14:wrappingTextBoxFlag xmlns="" xmlns:ma14="http://schemas.microsoft.com/office/mac/drawingml/2011/main" val="0"/>
             </a:ext>
           </a:extLst>
         </p:spPr>
@@ -17019,7 +17035,7 @@
           </a:prstGeom>
           <a:extLst>
             <a:ext uri="{C572A759-6A51-4108-AA02-DFA0A04FC94B}">
-              <ma14:wrappingTextBoxFlag xmlns:ma14="http://schemas.microsoft.com/office/mac/drawingml/2011/main" xmlns="" val="0"/>
+              <ma14:wrappingTextBoxFlag xmlns="" xmlns:ma14="http://schemas.microsoft.com/office/mac/drawingml/2011/main" val="0"/>
             </a:ext>
           </a:extLst>
         </p:spPr>
@@ -17691,7 +17707,7 @@
           </a:prstGeom>
           <a:extLst>
             <a:ext uri="{C572A759-6A51-4108-AA02-DFA0A04FC94B}">
-              <ma14:wrappingTextBoxFlag xmlns:ma14="http://schemas.microsoft.com/office/mac/drawingml/2011/main" xmlns="" val="0"/>
+              <ma14:wrappingTextBoxFlag xmlns="" xmlns:ma14="http://schemas.microsoft.com/office/mac/drawingml/2011/main" val="0"/>
             </a:ext>
           </a:extLst>
         </p:spPr>
@@ -18626,7 +18642,7 @@
           </a:prstGeom>
           <a:extLst>
             <a:ext uri="{C572A759-6A51-4108-AA02-DFA0A04FC94B}">
-              <ma14:wrappingTextBoxFlag xmlns:ma14="http://schemas.microsoft.com/office/mac/drawingml/2011/main" xmlns="" val="0"/>
+              <ma14:wrappingTextBoxFlag xmlns="" xmlns:ma14="http://schemas.microsoft.com/office/mac/drawingml/2011/main" val="0"/>
             </a:ext>
           </a:extLst>
         </p:spPr>
@@ -19252,7 +19268,7 @@
           </a:prstGeom>
           <a:extLst>
             <a:ext uri="{C572A759-6A51-4108-AA02-DFA0A04FC94B}">
-              <ma14:wrappingTextBoxFlag xmlns:ma14="http://schemas.microsoft.com/office/mac/drawingml/2011/main" xmlns="" val="0"/>
+              <ma14:wrappingTextBoxFlag xmlns="" xmlns:ma14="http://schemas.microsoft.com/office/mac/drawingml/2011/main" val="0"/>
             </a:ext>
           </a:extLst>
         </p:spPr>
@@ -19402,7 +19418,7 @@
           </a:prstGeom>
           <a:extLst>
             <a:ext uri="{C572A759-6A51-4108-AA02-DFA0A04FC94B}">
-              <ma14:wrappingTextBoxFlag xmlns:ma14="http://schemas.microsoft.com/office/mac/drawingml/2011/main" xmlns="" val="0"/>
+              <ma14:wrappingTextBoxFlag xmlns="" xmlns:ma14="http://schemas.microsoft.com/office/mac/drawingml/2011/main" val="0"/>
             </a:ext>
           </a:extLst>
         </p:spPr>
@@ -20118,7 +20134,7 @@
           </a:prstGeom>
           <a:extLst>
             <a:ext uri="{C572A759-6A51-4108-AA02-DFA0A04FC94B}">
-              <ma14:wrappingTextBoxFlag xmlns:ma14="http://schemas.microsoft.com/office/mac/drawingml/2011/main" xmlns="" val="0"/>
+              <ma14:wrappingTextBoxFlag xmlns="" xmlns:ma14="http://schemas.microsoft.com/office/mac/drawingml/2011/main" val="0"/>
             </a:ext>
           </a:extLst>
         </p:spPr>
@@ -20308,7 +20324,7 @@
           </a:prstGeom>
           <a:extLst>
             <a:ext uri="{C572A759-6A51-4108-AA02-DFA0A04FC94B}">
-              <ma14:wrappingTextBoxFlag xmlns:ma14="http://schemas.microsoft.com/office/mac/drawingml/2011/main" xmlns="" val="0"/>
+              <ma14:wrappingTextBoxFlag xmlns="" xmlns:ma14="http://schemas.microsoft.com/office/mac/drawingml/2011/main" val="0"/>
             </a:ext>
           </a:extLst>
         </p:spPr>
@@ -21070,7 +21086,7 @@
           </a:prstGeom>
           <a:extLst>
             <a:ext uri="{C572A759-6A51-4108-AA02-DFA0A04FC94B}">
-              <ma14:wrappingTextBoxFlag xmlns:ma14="http://schemas.microsoft.com/office/mac/drawingml/2011/main" xmlns="" val="0"/>
+              <ma14:wrappingTextBoxFlag xmlns="" xmlns:ma14="http://schemas.microsoft.com/office/mac/drawingml/2011/main" val="0"/>
             </a:ext>
           </a:extLst>
         </p:spPr>
@@ -21931,7 +21947,7 @@
           </a:prstGeom>
           <a:extLst>
             <a:ext uri="{C572A759-6A51-4108-AA02-DFA0A04FC94B}">
-              <ma14:wrappingTextBoxFlag xmlns:ma14="http://schemas.microsoft.com/office/mac/drawingml/2011/main" xmlns="" val="0"/>
+              <ma14:wrappingTextBoxFlag xmlns="" xmlns:ma14="http://schemas.microsoft.com/office/mac/drawingml/2011/main" val="0"/>
             </a:ext>
           </a:extLst>
         </p:spPr>
@@ -23222,7 +23238,7 @@
           </a:prstGeom>
           <a:extLst>
             <a:ext uri="{C572A759-6A51-4108-AA02-DFA0A04FC94B}">
-              <ma14:wrappingTextBoxFlag xmlns:ma14="http://schemas.microsoft.com/office/mac/drawingml/2011/main" xmlns="" val="0"/>
+              <ma14:wrappingTextBoxFlag xmlns="" xmlns:ma14="http://schemas.microsoft.com/office/mac/drawingml/2011/main" val="0"/>
             </a:ext>
           </a:extLst>
         </p:spPr>
@@ -23372,7 +23388,7 @@
           </a:prstGeom>
           <a:extLst>
             <a:ext uri="{C572A759-6A51-4108-AA02-DFA0A04FC94B}">
-              <ma14:wrappingTextBoxFlag xmlns:ma14="http://schemas.microsoft.com/office/mac/drawingml/2011/main" xmlns="" val="0"/>
+              <ma14:wrappingTextBoxFlag xmlns="" xmlns:ma14="http://schemas.microsoft.com/office/mac/drawingml/2011/main" val="0"/>
             </a:ext>
           </a:extLst>
         </p:spPr>
@@ -23562,7 +23578,7 @@
           </a:prstGeom>
           <a:extLst>
             <a:ext uri="{C572A759-6A51-4108-AA02-DFA0A04FC94B}">
-              <ma14:wrappingTextBoxFlag xmlns:ma14="http://schemas.microsoft.com/office/mac/drawingml/2011/main" xmlns="" val="0"/>
+              <ma14:wrappingTextBoxFlag xmlns="" xmlns:ma14="http://schemas.microsoft.com/office/mac/drawingml/2011/main" val="0"/>
             </a:ext>
           </a:extLst>
         </p:spPr>
@@ -24924,7 +24940,7 @@
           </a:prstGeom>
           <a:extLst>
             <a:ext uri="{C572A759-6A51-4108-AA02-DFA0A04FC94B}">
-              <ma14:wrappingTextBoxFlag xmlns:ma14="http://schemas.microsoft.com/office/mac/drawingml/2011/main" xmlns="" val="0"/>
+              <ma14:wrappingTextBoxFlag xmlns="" xmlns:ma14="http://schemas.microsoft.com/office/mac/drawingml/2011/main" val="0"/>
             </a:ext>
           </a:extLst>
         </p:spPr>
@@ -25719,7 +25735,7 @@
           </a:prstGeom>
           <a:extLst>
             <a:ext uri="{C572A759-6A51-4108-AA02-DFA0A04FC94B}">
-              <ma14:wrappingTextBoxFlag xmlns:ma14="http://schemas.microsoft.com/office/mac/drawingml/2011/main" xmlns="" val="0"/>
+              <ma14:wrappingTextBoxFlag xmlns="" xmlns:ma14="http://schemas.microsoft.com/office/mac/drawingml/2011/main" val="0"/>
             </a:ext>
           </a:extLst>
         </p:spPr>
@@ -26599,7 +26615,7 @@
           </a:prstGeom>
           <a:extLst>
             <a:ext uri="{C572A759-6A51-4108-AA02-DFA0A04FC94B}">
-              <ma14:wrappingTextBoxFlag xmlns:ma14="http://schemas.microsoft.com/office/mac/drawingml/2011/main" xmlns="" val="0"/>
+              <ma14:wrappingTextBoxFlag xmlns="" xmlns:ma14="http://schemas.microsoft.com/office/mac/drawingml/2011/main" val="0"/>
             </a:ext>
           </a:extLst>
         </p:spPr>
@@ -27348,7 +27364,7 @@
                   <a:schemeClr val="bg1"/>
                 </a:solidFill>
               </a:rPr>
-              <a:t>per gli operatori con minore esperienza o competenza iniziale</a:t>
+              <a:t>per gli operatori con minore esperienza </a:t>
             </a:r>
             <a:endParaRPr lang="it-IT" sz="1200" dirty="0"/>
           </a:p>
@@ -27462,7 +27478,7 @@
           </a:prstGeom>
           <a:extLst>
             <a:ext uri="{C572A759-6A51-4108-AA02-DFA0A04FC94B}">
-              <ma14:wrappingTextBoxFlag xmlns:ma14="http://schemas.microsoft.com/office/mac/drawingml/2011/main" xmlns="" val="0"/>
+              <ma14:wrappingTextBoxFlag xmlns="" xmlns:ma14="http://schemas.microsoft.com/office/mac/drawingml/2011/main" val="0"/>
             </a:ext>
           </a:extLst>
         </p:spPr>
@@ -28529,7 +28545,7 @@
           </a:prstGeom>
           <a:extLst>
             <a:ext uri="{C572A759-6A51-4108-AA02-DFA0A04FC94B}">
-              <ma14:wrappingTextBoxFlag xmlns:ma14="http://schemas.microsoft.com/office/mac/drawingml/2011/main" xmlns="" val="0"/>
+              <ma14:wrappingTextBoxFlag xmlns="" xmlns:ma14="http://schemas.microsoft.com/office/mac/drawingml/2011/main" val="0"/>
             </a:ext>
           </a:extLst>
         </p:spPr>
@@ -29254,7 +29270,7 @@
           </a:prstGeom>
           <a:extLst>
             <a:ext uri="{C572A759-6A51-4108-AA02-DFA0A04FC94B}">
-              <ma14:wrappingTextBoxFlag xmlns:ma14="http://schemas.microsoft.com/office/mac/drawingml/2011/main" xmlns="" val="0"/>
+              <ma14:wrappingTextBoxFlag xmlns="" xmlns:ma14="http://schemas.microsoft.com/office/mac/drawingml/2011/main" val="0"/>
             </a:ext>
           </a:extLst>
         </p:spPr>
@@ -29972,7 +29988,7 @@
           </a:prstGeom>
           <a:extLst>
             <a:ext uri="{C572A759-6A51-4108-AA02-DFA0A04FC94B}">
-              <ma14:wrappingTextBoxFlag xmlns:ma14="http://schemas.microsoft.com/office/mac/drawingml/2011/main" xmlns="" val="0"/>
+              <ma14:wrappingTextBoxFlag xmlns="" xmlns:ma14="http://schemas.microsoft.com/office/mac/drawingml/2011/main" val="0"/>
             </a:ext>
           </a:extLst>
         </p:spPr>
@@ -30623,7 +30639,7 @@
           </a:prstGeom>
           <a:extLst>
             <a:ext uri="{C572A759-6A51-4108-AA02-DFA0A04FC94B}">
-              <ma14:wrappingTextBoxFlag xmlns:ma14="http://schemas.microsoft.com/office/mac/drawingml/2011/main" xmlns="" val="0"/>
+              <ma14:wrappingTextBoxFlag xmlns="" xmlns:ma14="http://schemas.microsoft.com/office/mac/drawingml/2011/main" val="0"/>
             </a:ext>
           </a:extLst>
         </p:spPr>
@@ -30773,7 +30789,7 @@
           </a:prstGeom>
           <a:extLst>
             <a:ext uri="{C572A759-6A51-4108-AA02-DFA0A04FC94B}">
-              <ma14:wrappingTextBoxFlag xmlns:ma14="http://schemas.microsoft.com/office/mac/drawingml/2011/main" xmlns="" val="0"/>
+              <ma14:wrappingTextBoxFlag xmlns="" xmlns:ma14="http://schemas.microsoft.com/office/mac/drawingml/2011/main" val="0"/>
             </a:ext>
           </a:extLst>
         </p:spPr>
@@ -30963,7 +30979,7 @@
           </a:prstGeom>
           <a:extLst>
             <a:ext uri="{C572A759-6A51-4108-AA02-DFA0A04FC94B}">
-              <ma14:wrappingTextBoxFlag xmlns:ma14="http://schemas.microsoft.com/office/mac/drawingml/2011/main" xmlns="" val="0"/>
+              <ma14:wrappingTextBoxFlag xmlns="" xmlns:ma14="http://schemas.microsoft.com/office/mac/drawingml/2011/main" val="0"/>
             </a:ext>
           </a:extLst>
         </p:spPr>
@@ -31466,7 +31482,7 @@
           </a:prstGeom>
           <a:extLst>
             <a:ext uri="{C572A759-6A51-4108-AA02-DFA0A04FC94B}">
-              <ma14:wrappingTextBoxFlag xmlns:ma14="http://schemas.microsoft.com/office/mac/drawingml/2011/main" xmlns="" val="0"/>
+              <ma14:wrappingTextBoxFlag xmlns="" xmlns:ma14="http://schemas.microsoft.com/office/mac/drawingml/2011/main" val="0"/>
             </a:ext>
           </a:extLst>
         </p:spPr>
@@ -32983,7 +32999,7 @@
           </a:prstGeom>
           <a:extLst>
             <a:ext uri="{C572A759-6A51-4108-AA02-DFA0A04FC94B}">
-              <ma14:wrappingTextBoxFlag xmlns:ma14="http://schemas.microsoft.com/office/mac/drawingml/2011/main" xmlns="" val="0"/>
+              <ma14:wrappingTextBoxFlag xmlns="" xmlns:ma14="http://schemas.microsoft.com/office/mac/drawingml/2011/main" val="0"/>
             </a:ext>
           </a:extLst>
         </p:spPr>
@@ -33585,7 +33601,7 @@
           </a:prstGeom>
           <a:extLst>
             <a:ext uri="{C572A759-6A51-4108-AA02-DFA0A04FC94B}">
-              <ma14:wrappingTextBoxFlag xmlns:ma14="http://schemas.microsoft.com/office/mac/drawingml/2011/main" xmlns="" val="0"/>
+              <ma14:wrappingTextBoxFlag xmlns="" xmlns:ma14="http://schemas.microsoft.com/office/mac/drawingml/2011/main" val="0"/>
             </a:ext>
           </a:extLst>
         </p:spPr>
@@ -34607,7 +34623,7 @@
           </a:prstGeom>
           <a:extLst>
             <a:ext uri="{C572A759-6A51-4108-AA02-DFA0A04FC94B}">
-              <ma14:wrappingTextBoxFlag xmlns:ma14="http://schemas.microsoft.com/office/mac/drawingml/2011/main" xmlns="" val="0"/>
+              <ma14:wrappingTextBoxFlag xmlns="" xmlns:ma14="http://schemas.microsoft.com/office/mac/drawingml/2011/main" val="0"/>
             </a:ext>
           </a:extLst>
         </p:spPr>
@@ -35243,7 +35259,7 @@
           </a:prstGeom>
           <a:extLst>
             <a:ext uri="{C572A759-6A51-4108-AA02-DFA0A04FC94B}">
-              <ma14:wrappingTextBoxFlag xmlns:ma14="http://schemas.microsoft.com/office/mac/drawingml/2011/main" xmlns="" val="0"/>
+              <ma14:wrappingTextBoxFlag xmlns="" xmlns:ma14="http://schemas.microsoft.com/office/mac/drawingml/2011/main" val="0"/>
             </a:ext>
           </a:extLst>
         </p:spPr>
@@ -36415,7 +36431,7 @@
           </a:prstGeom>
           <a:extLst>
             <a:ext uri="{C572A759-6A51-4108-AA02-DFA0A04FC94B}">
-              <ma14:wrappingTextBoxFlag xmlns:ma14="http://schemas.microsoft.com/office/mac/drawingml/2011/main" xmlns="" val="0"/>
+              <ma14:wrappingTextBoxFlag xmlns="" xmlns:ma14="http://schemas.microsoft.com/office/mac/drawingml/2011/main" val="0"/>
             </a:ext>
           </a:extLst>
         </p:spPr>
@@ -37033,7 +37049,7 @@
           </a:prstGeom>
           <a:extLst>
             <a:ext uri="{C572A759-6A51-4108-AA02-DFA0A04FC94B}">
-              <ma14:wrappingTextBoxFlag xmlns:ma14="http://schemas.microsoft.com/office/mac/drawingml/2011/main" xmlns="" val="0"/>
+              <ma14:wrappingTextBoxFlag xmlns="" xmlns:ma14="http://schemas.microsoft.com/office/mac/drawingml/2011/main" val="0"/>
             </a:ext>
           </a:extLst>
         </p:spPr>
@@ -37908,7 +37924,7 @@
           </a:prstGeom>
           <a:extLst>
             <a:ext uri="{C572A759-6A51-4108-AA02-DFA0A04FC94B}">
-              <ma14:wrappingTextBoxFlag xmlns:ma14="http://schemas.microsoft.com/office/mac/drawingml/2011/main" xmlns="" val="0"/>
+              <ma14:wrappingTextBoxFlag xmlns="" xmlns:ma14="http://schemas.microsoft.com/office/mac/drawingml/2011/main" val="0"/>
             </a:ext>
           </a:extLst>
         </p:spPr>
@@ -38058,7 +38074,7 @@
           </a:prstGeom>
           <a:extLst>
             <a:ext uri="{C572A759-6A51-4108-AA02-DFA0A04FC94B}">
-              <ma14:wrappingTextBoxFlag xmlns:ma14="http://schemas.microsoft.com/office/mac/drawingml/2011/main" xmlns="" val="0"/>
+              <ma14:wrappingTextBoxFlag xmlns="" xmlns:ma14="http://schemas.microsoft.com/office/mac/drawingml/2011/main" val="0"/>
             </a:ext>
           </a:extLst>
         </p:spPr>
@@ -38990,7 +39006,7 @@
           </a:prstGeom>
           <a:extLst>
             <a:ext uri="{C572A759-6A51-4108-AA02-DFA0A04FC94B}">
-              <ma14:wrappingTextBoxFlag xmlns:ma14="http://schemas.microsoft.com/office/mac/drawingml/2011/main" xmlns="" val="0"/>
+              <ma14:wrappingTextBoxFlag xmlns="" xmlns:ma14="http://schemas.microsoft.com/office/mac/drawingml/2011/main" val="0"/>
             </a:ext>
           </a:extLst>
         </p:spPr>
@@ -39688,7 +39704,7 @@
           </a:prstGeom>
           <a:extLst>
             <a:ext uri="{C572A759-6A51-4108-AA02-DFA0A04FC94B}">
-              <ma14:wrappingTextBoxFlag xmlns:ma14="http://schemas.microsoft.com/office/mac/drawingml/2011/main" xmlns="" val="0"/>
+              <ma14:wrappingTextBoxFlag xmlns="" xmlns:ma14="http://schemas.microsoft.com/office/mac/drawingml/2011/main" val="0"/>
             </a:ext>
           </a:extLst>
         </p:spPr>
@@ -40901,7 +40917,7 @@
           </a:prstGeom>
           <a:extLst>
             <a:ext uri="{C572A759-6A51-4108-AA02-DFA0A04FC94B}">
-              <ma14:wrappingTextBoxFlag xmlns:ma14="http://schemas.microsoft.com/office/mac/drawingml/2011/main" xmlns="" val="0"/>
+              <ma14:wrappingTextBoxFlag xmlns="" xmlns:ma14="http://schemas.microsoft.com/office/mac/drawingml/2011/main" val="0"/>
             </a:ext>
           </a:extLst>
         </p:spPr>
@@ -42139,7 +42155,7 @@
           </a:prstGeom>
           <a:extLst>
             <a:ext uri="{C572A759-6A51-4108-AA02-DFA0A04FC94B}">
-              <ma14:wrappingTextBoxFlag xmlns:ma14="http://schemas.microsoft.com/office/mac/drawingml/2011/main" xmlns="" val="0"/>
+              <ma14:wrappingTextBoxFlag xmlns="" xmlns:ma14="http://schemas.microsoft.com/office/mac/drawingml/2011/main" val="0"/>
             </a:ext>
           </a:extLst>
         </p:spPr>
@@ -42702,7 +42718,7 @@
           </a:prstGeom>
           <a:extLst>
             <a:ext uri="{C572A759-6A51-4108-AA02-DFA0A04FC94B}">
-              <ma14:wrappingTextBoxFlag xmlns:ma14="http://schemas.microsoft.com/office/mac/drawingml/2011/main" xmlns="" val="0"/>
+              <ma14:wrappingTextBoxFlag xmlns="" xmlns:ma14="http://schemas.microsoft.com/office/mac/drawingml/2011/main" val="0"/>
             </a:ext>
           </a:extLst>
         </p:spPr>
@@ -43509,7 +43525,7 @@
           </a:prstGeom>
           <a:extLst>
             <a:ext uri="{C572A759-6A51-4108-AA02-DFA0A04FC94B}">
-              <ma14:wrappingTextBoxFlag xmlns:ma14="http://schemas.microsoft.com/office/mac/drawingml/2011/main" xmlns="" val="0"/>
+              <ma14:wrappingTextBoxFlag xmlns="" xmlns:ma14="http://schemas.microsoft.com/office/mac/drawingml/2011/main" val="0"/>
             </a:ext>
           </a:extLst>
         </p:spPr>
@@ -44274,7 +44290,7 @@
           </a:prstGeom>
           <a:extLst>
             <a:ext uri="{C572A759-6A51-4108-AA02-DFA0A04FC94B}">
-              <ma14:wrappingTextBoxFlag xmlns:ma14="http://schemas.microsoft.com/office/mac/drawingml/2011/main" xmlns="" val="0"/>
+              <ma14:wrappingTextBoxFlag xmlns="" xmlns:ma14="http://schemas.microsoft.com/office/mac/drawingml/2011/main" val="0"/>
             </a:ext>
           </a:extLst>
         </p:spPr>
@@ -44464,7 +44480,7 @@
           </a:prstGeom>
           <a:extLst>
             <a:ext uri="{C572A759-6A51-4108-AA02-DFA0A04FC94B}">
-              <ma14:wrappingTextBoxFlag xmlns:ma14="http://schemas.microsoft.com/office/mac/drawingml/2011/main" xmlns="" val="0"/>
+              <ma14:wrappingTextBoxFlag xmlns="" xmlns:ma14="http://schemas.microsoft.com/office/mac/drawingml/2011/main" val="0"/>
             </a:ext>
           </a:extLst>
         </p:spPr>
@@ -44950,7 +44966,7 @@
           </a:prstGeom>
           <a:extLst>
             <a:ext uri="{C572A759-6A51-4108-AA02-DFA0A04FC94B}">
-              <ma14:wrappingTextBoxFlag xmlns:ma14="http://schemas.microsoft.com/office/mac/drawingml/2011/main" xmlns="" val="0"/>
+              <ma14:wrappingTextBoxFlag xmlns="" xmlns:ma14="http://schemas.microsoft.com/office/mac/drawingml/2011/main" val="0"/>
             </a:ext>
           </a:extLst>
         </p:spPr>
@@ -46170,7 +46186,7 @@
           </a:prstGeom>
           <a:extLst>
             <a:ext uri="{C572A759-6A51-4108-AA02-DFA0A04FC94B}">
-              <ma14:wrappingTextBoxFlag xmlns:ma14="http://schemas.microsoft.com/office/mac/drawingml/2011/main" xmlns="" val="0"/>
+              <ma14:wrappingTextBoxFlag xmlns="" xmlns:ma14="http://schemas.microsoft.com/office/mac/drawingml/2011/main" val="0"/>
             </a:ext>
           </a:extLst>
         </p:spPr>
@@ -47105,7 +47121,7 @@
           </a:prstGeom>
           <a:extLst>
             <a:ext uri="{C572A759-6A51-4108-AA02-DFA0A04FC94B}">
-              <ma14:wrappingTextBoxFlag xmlns:ma14="http://schemas.microsoft.com/office/mac/drawingml/2011/main" xmlns="" val="0"/>
+              <ma14:wrappingTextBoxFlag xmlns="" xmlns:ma14="http://schemas.microsoft.com/office/mac/drawingml/2011/main" val="0"/>
             </a:ext>
           </a:extLst>
         </p:spPr>
